--- a/media/resources/files/Onduktar_Akcha_JooptorLabyrynthi.pptx
+++ b/media/resources/files/Onduktar_Akcha_JooptorLabyrynthi.pptx
@@ -21145,7 +21145,7 @@
                 <a:ea typeface="+mn-ea"/>
                 <a:cs typeface="+mn-cs"/>
               </a:rPr>
-              <a:t>Турдуу пикирлер учун ыраазычылык билдиребиз.</a:t>
+              <a:t>Түрдүү пикирлер үчүн ыраазычылык билдиребиз.</a:t>
             </a:r>
           </a:p>
           <a:p>

--- a/media/resources/files/Onduktar_Akcha_JooptorLabyrynthi.pptx
+++ b/media/resources/files/Onduktar_Akcha_JooptorLabyrynthi.pptx
@@ -5445,7 +5445,7 @@
                   <a:schemeClr val="tx1"/>
                 </a:solidFill>
               </a:rPr>
-              <a:t>11.54</a:t>
+              <a:t>11,54</a:t>
             </a:r>
             <a:r>
               <a:rPr lang="ky-KG" sz="1950" dirty="0">
@@ -5524,7 +5524,7 @@
                   <a:schemeClr val="tx1"/>
                 </a:solidFill>
               </a:rPr>
-              <a:t>£7.94</a:t>
+              <a:t>£7,94</a:t>
             </a:r>
             <a:r>
               <a:rPr lang="ky-KG" sz="1950" dirty="0">
@@ -5603,7 +5603,7 @@
                   <a:schemeClr val="tx1"/>
                 </a:solidFill>
               </a:rPr>
-              <a:t>19.61</a:t>
+              <a:t>19,61</a:t>
             </a:r>
             <a:r>
               <a:rPr lang="ky-KG" sz="1950" dirty="0">
@@ -5682,7 +5682,7 @@
                   <a:schemeClr val="tx1"/>
                 </a:solidFill>
               </a:rPr>
-              <a:t>4.67</a:t>
+              <a:t>4,67</a:t>
             </a:r>
             <a:r>
               <a:rPr lang="ky-KG" sz="1950" dirty="0">
@@ -6706,7 +6706,7 @@
                   <a:schemeClr val="tx1"/>
                 </a:solidFill>
               </a:rPr>
-              <a:t>10.59</a:t>
+              <a:t>10,59</a:t>
             </a:r>
             <a:r>
               <a:rPr lang="ky-KG" sz="1950" dirty="0">
@@ -6793,7 +6793,7 @@
                   <a:schemeClr val="tx1"/>
                 </a:solidFill>
               </a:rPr>
-              <a:t>.</a:t>
+              <a:t>,</a:t>
             </a:r>
             <a:r>
               <a:rPr lang="en-GB" sz="1950" dirty="0">
@@ -6880,7 +6880,7 @@
                   <a:schemeClr val="tx1"/>
                 </a:solidFill>
               </a:rPr>
-              <a:t>5.24</a:t>
+              <a:t>5,24</a:t>
             </a:r>
             <a:r>
               <a:rPr lang="ky-KG" sz="1950" dirty="0">
@@ -6959,7 +6959,7 @@
                   <a:schemeClr val="tx1"/>
                 </a:solidFill>
               </a:rPr>
-              <a:t>4.55</a:t>
+              <a:t>4,55</a:t>
             </a:r>
             <a:r>
               <a:rPr lang="ky-KG" sz="1950" dirty="0">
@@ -7038,7 +7038,7 @@
                   <a:schemeClr val="tx1"/>
                 </a:solidFill>
               </a:rPr>
-              <a:t>5.35</a:t>
+              <a:t>5,35</a:t>
             </a:r>
             <a:r>
               <a:rPr lang="ky-KG" sz="1950" dirty="0">
@@ -7117,7 +7117,7 @@
                   <a:schemeClr val="tx1"/>
                 </a:solidFill>
               </a:rPr>
-              <a:t>7.93</a:t>
+              <a:t>7,93</a:t>
             </a:r>
             <a:r>
               <a:rPr lang="ky-KG" sz="1950" dirty="0">
@@ -7196,7 +7196,7 @@
                   <a:schemeClr val="tx1"/>
                 </a:solidFill>
               </a:rPr>
-              <a:t>7.99</a:t>
+              <a:t>7,99</a:t>
             </a:r>
             <a:r>
               <a:rPr lang="ky-KG" sz="1950" dirty="0">
@@ -7275,7 +7275,7 @@
                   <a:schemeClr val="tx1"/>
                 </a:solidFill>
               </a:rPr>
-              <a:t>8.85</a:t>
+              <a:t>8,85</a:t>
             </a:r>
             <a:r>
               <a:rPr lang="ky-KG" sz="1950" dirty="0">
@@ -7354,7 +7354,7 @@
                   <a:schemeClr val="tx1"/>
                 </a:solidFill>
               </a:rPr>
-              <a:t>14.20</a:t>
+              <a:t>14,20</a:t>
             </a:r>
             <a:r>
               <a:rPr lang="ky-KG" sz="1950" dirty="0">
@@ -7433,7 +7433,7 @@
                   <a:schemeClr val="tx1"/>
                 </a:solidFill>
               </a:rPr>
-              <a:t>25.44</a:t>
+              <a:t>25,44</a:t>
             </a:r>
             <a:r>
               <a:rPr lang="ky-KG" sz="1950" dirty="0">
@@ -7512,7 +7512,7 @@
                   <a:schemeClr val="tx1"/>
                 </a:solidFill>
               </a:rPr>
-              <a:t>6.87</a:t>
+              <a:t>6,87</a:t>
             </a:r>
             <a:r>
               <a:rPr lang="ky-KG" sz="1950" dirty="0">
@@ -7591,7 +7591,7 @@
                   <a:schemeClr val="tx1"/>
                 </a:solidFill>
               </a:rPr>
-              <a:t>16.58</a:t>
+              <a:t>16,58</a:t>
             </a:r>
             <a:r>
               <a:rPr lang="ky-KG" sz="1950" dirty="0">
@@ -7670,7 +7670,7 @@
                   <a:schemeClr val="tx1"/>
                 </a:solidFill>
               </a:rPr>
-              <a:t>17.04</a:t>
+              <a:t>17,04</a:t>
             </a:r>
             <a:r>
               <a:rPr lang="ky-KG" sz="1950" dirty="0">
@@ -7749,7 +7749,7 @@
                   <a:schemeClr val="tx1"/>
                 </a:solidFill>
               </a:rPr>
-              <a:t>95.53</a:t>
+              <a:t>95,53</a:t>
             </a:r>
             <a:r>
               <a:rPr lang="ky-KG" sz="1950" dirty="0">
@@ -7828,7 +7828,7 @@
                   <a:schemeClr val="tx1"/>
                 </a:solidFill>
               </a:rPr>
-              <a:t>96.25</a:t>
+              <a:t>96,25</a:t>
             </a:r>
             <a:r>
               <a:rPr lang="ky-KG" sz="1950" dirty="0">
@@ -8282,7 +8282,7 @@
             <a:pPr algn="ctr"/>
             <a:r>
               <a:rPr lang="ru-RU" sz="1400" dirty="0"/>
-              <a:t>3.75сомго 10 калем</a:t>
+              <a:t>3,75сомго 10 калем</a:t>
             </a:r>
           </a:p>
           <a:p>
@@ -8478,14 +8478,14 @@
             <a:pPr algn="ctr"/>
             <a:r>
               <a:rPr lang="ky-KG" sz="1400" dirty="0"/>
-              <a:t>4.24 с-го 20 карандаш,</a:t>
+              <a:t>4,24 с-го 20 карандаш,</a:t>
             </a:r>
           </a:p>
           <a:p>
             <a:pPr algn="ctr"/>
             <a:r>
               <a:rPr lang="ky-KG" sz="1400" dirty="0"/>
-              <a:t>ЖЕ 3.20с-го 10 карандаш </a:t>
+              <a:t>ЖЕ 3,20с-го 10 карандаш </a:t>
             </a:r>
           </a:p>
           <a:p>
@@ -8550,14 +8550,14 @@
             <a:pPr algn="ctr"/>
             <a:r>
               <a:rPr lang="ru-RU" sz="1400" dirty="0"/>
-              <a:t>Чоңдорго билет: 7.65с</a:t>
+              <a:t>Чоңдорго билет: 7,65с</a:t>
             </a:r>
           </a:p>
           <a:p>
             <a:pPr algn="ctr"/>
             <a:r>
               <a:rPr lang="ru-RU" sz="1400" dirty="0"/>
-              <a:t>Балдар билети: 5.45с</a:t>
+              <a:t>Балдар билети: 5,45с</a:t>
             </a:r>
           </a:p>
           <a:p>
@@ -8943,7 +8943,7 @@
             <a:pPr algn="ctr"/>
             <a:r>
               <a:rPr lang="ky-KG" sz="1400" dirty="0"/>
-              <a:t>ЖЕ,4.62 с-го  10 карандаш</a:t>
+              <a:t>ЖЕ,4,62 с-го  10 карандаш</a:t>
             </a:r>
           </a:p>
           <a:p>
@@ -9008,7 +9008,7 @@
             <a:pPr algn="ctr"/>
             <a:r>
               <a:rPr lang="ru-RU" sz="1400" dirty="0"/>
-              <a:t>Чоңдорго билет: 5.23</a:t>
+              <a:t>Чоңдорго билет: 5,23</a:t>
             </a:r>
             <a:r>
               <a:rPr lang="en-US" sz="1400" dirty="0"/>
@@ -9020,7 +9020,7 @@
             <a:pPr algn="ctr"/>
             <a:r>
               <a:rPr lang="ru-RU" sz="1400" dirty="0"/>
-              <a:t>Балдар билети: 4.13</a:t>
+              <a:t>Балдар билети: 4,13</a:t>
             </a:r>
             <a:r>
               <a:rPr lang="en-US" sz="1400" dirty="0"/>
@@ -9109,7 +9109,7 @@
             <a:pPr algn="ctr"/>
             <a:r>
               <a:rPr lang="ky-KG" sz="1400" dirty="0"/>
-              <a:t>4.56сомго 20 сызгыч</a:t>
+              <a:t>4,56сомго 20 сызгыч</a:t>
             </a:r>
           </a:p>
           <a:p>
@@ -9174,7 +9174,7 @@
             <a:pPr algn="ctr"/>
             <a:r>
               <a:rPr lang="ru-RU" sz="1400" dirty="0"/>
-              <a:t>3.40сомго  6 шаурма</a:t>
+              <a:t>3,40сомго  6 шаурма</a:t>
             </a:r>
           </a:p>
           <a:p>
@@ -10720,7 +10720,7 @@
                   <a:schemeClr val="tx1"/>
                 </a:solidFill>
               </a:rPr>
-              <a:t>11.54</a:t>
+              <a:t>11,54</a:t>
             </a:r>
             <a:r>
               <a:rPr lang="ky-KG" sz="1950" dirty="0">
@@ -10799,7 +10799,7 @@
                   <a:schemeClr val="tx1"/>
                 </a:solidFill>
               </a:rPr>
-              <a:t>£7.94</a:t>
+              <a:t>£7,94</a:t>
             </a:r>
             <a:r>
               <a:rPr lang="ky-KG" sz="1950" dirty="0">
@@ -10878,7 +10878,7 @@
                   <a:schemeClr val="tx1"/>
                 </a:solidFill>
               </a:rPr>
-              <a:t>19.61</a:t>
+              <a:t>19,61</a:t>
             </a:r>
             <a:r>
               <a:rPr lang="ky-KG" sz="1950" dirty="0">
@@ -10957,7 +10957,7 @@
                   <a:schemeClr val="tx1"/>
                 </a:solidFill>
               </a:rPr>
-              <a:t>4.67</a:t>
+              <a:t>4,67</a:t>
             </a:r>
             <a:r>
               <a:rPr lang="ky-KG" sz="1950" dirty="0">
@@ -11990,7 +11990,7 @@
                   <a:schemeClr val="tx1"/>
                 </a:solidFill>
               </a:rPr>
-              <a:t>10.59</a:t>
+              <a:t>10,59</a:t>
             </a:r>
             <a:r>
               <a:rPr lang="ky-KG" sz="1950" dirty="0">
@@ -12077,7 +12077,7 @@
                   <a:schemeClr val="tx1"/>
                 </a:solidFill>
               </a:rPr>
-              <a:t>.</a:t>
+              <a:t>,</a:t>
             </a:r>
             <a:r>
               <a:rPr lang="en-GB" sz="1950" dirty="0">
@@ -12164,7 +12164,7 @@
                   <a:schemeClr val="tx1"/>
                 </a:solidFill>
               </a:rPr>
-              <a:t>5.24</a:t>
+              <a:t>5,24</a:t>
             </a:r>
             <a:r>
               <a:rPr lang="ky-KG" sz="1950" dirty="0">
@@ -12243,7 +12243,7 @@
                   <a:schemeClr val="tx1"/>
                 </a:solidFill>
               </a:rPr>
-              <a:t>4.55</a:t>
+              <a:t>4,55</a:t>
             </a:r>
             <a:r>
               <a:rPr lang="ky-KG" sz="1950" dirty="0">
@@ -12322,7 +12322,7 @@
                   <a:schemeClr val="tx1"/>
                 </a:solidFill>
               </a:rPr>
-              <a:t>5.35</a:t>
+              <a:t>5,35</a:t>
             </a:r>
             <a:r>
               <a:rPr lang="ky-KG" sz="1950" dirty="0">
@@ -12401,7 +12401,7 @@
                   <a:schemeClr val="tx1"/>
                 </a:solidFill>
               </a:rPr>
-              <a:t>7.93</a:t>
+              <a:t>7,93</a:t>
             </a:r>
             <a:r>
               <a:rPr lang="ky-KG" sz="1950" dirty="0">
@@ -12480,7 +12480,7 @@
                   <a:schemeClr val="tx1"/>
                 </a:solidFill>
               </a:rPr>
-              <a:t>7.99</a:t>
+              <a:t>7,99</a:t>
             </a:r>
             <a:r>
               <a:rPr lang="ky-KG" sz="1950" dirty="0">
@@ -12559,7 +12559,7 @@
                   <a:schemeClr val="tx1"/>
                 </a:solidFill>
               </a:rPr>
-              <a:t>8.85</a:t>
+              <a:t>8,85</a:t>
             </a:r>
             <a:r>
               <a:rPr lang="ky-KG" sz="1950" dirty="0">
@@ -12638,7 +12638,7 @@
                   <a:schemeClr val="tx1"/>
                 </a:solidFill>
               </a:rPr>
-              <a:t>14.20</a:t>
+              <a:t>14,20</a:t>
             </a:r>
             <a:r>
               <a:rPr lang="ky-KG" sz="1950" dirty="0">
@@ -12717,7 +12717,7 @@
                   <a:schemeClr val="tx1"/>
                 </a:solidFill>
               </a:rPr>
-              <a:t>25.44</a:t>
+              <a:t>25,44</a:t>
             </a:r>
             <a:r>
               <a:rPr lang="ky-KG" sz="1950" dirty="0">
@@ -12796,7 +12796,7 @@
                   <a:schemeClr val="tx1"/>
                 </a:solidFill>
               </a:rPr>
-              <a:t>6.87</a:t>
+              <a:t>6,87</a:t>
             </a:r>
             <a:r>
               <a:rPr lang="ky-KG" sz="1950" dirty="0">
@@ -12875,7 +12875,7 @@
                   <a:schemeClr val="tx1"/>
                 </a:solidFill>
               </a:rPr>
-              <a:t>16.58</a:t>
+              <a:t>16,58</a:t>
             </a:r>
             <a:r>
               <a:rPr lang="ky-KG" sz="1950" dirty="0">
@@ -12954,7 +12954,7 @@
                   <a:schemeClr val="tx1"/>
                 </a:solidFill>
               </a:rPr>
-              <a:t>17.04</a:t>
+              <a:t>17,04</a:t>
             </a:r>
             <a:r>
               <a:rPr lang="ky-KG" sz="1950" dirty="0">
@@ -13033,7 +13033,7 @@
                   <a:schemeClr val="tx1"/>
                 </a:solidFill>
               </a:rPr>
-              <a:t>95.53</a:t>
+              <a:t>95,53</a:t>
             </a:r>
             <a:r>
               <a:rPr lang="ky-KG" sz="1950" dirty="0">
@@ -13112,7 +13112,7 @@
                   <a:schemeClr val="tx1"/>
                 </a:solidFill>
               </a:rPr>
-              <a:t>96.25</a:t>
+              <a:t>96,25</a:t>
             </a:r>
             <a:r>
               <a:rPr lang="ky-KG" sz="1950" dirty="0">
@@ -13566,7 +13566,7 @@
             <a:pPr algn="ctr"/>
             <a:r>
               <a:rPr lang="ru-RU" sz="1400" dirty="0"/>
-              <a:t>3.75сомго 10 калем</a:t>
+              <a:t>3,75сомго 10 калем</a:t>
             </a:r>
           </a:p>
           <a:p>
@@ -13762,14 +13762,14 @@
             <a:pPr algn="ctr"/>
             <a:r>
               <a:rPr lang="ky-KG" sz="1400" dirty="0"/>
-              <a:t>4.24 с-го 20 карандаш,</a:t>
+              <a:t>4,24 с-го 20 карандаш,</a:t>
             </a:r>
           </a:p>
           <a:p>
             <a:pPr algn="ctr"/>
             <a:r>
               <a:rPr lang="ky-KG" sz="1400" dirty="0"/>
-              <a:t>ЖЕ 3.20с-го 10 карандаш </a:t>
+              <a:t>ЖЕ 3,20с-го 10 карандаш </a:t>
             </a:r>
           </a:p>
           <a:p>
@@ -13834,14 +13834,14 @@
             <a:pPr algn="ctr"/>
             <a:r>
               <a:rPr lang="ru-RU" sz="1400" dirty="0"/>
-              <a:t>Чоңдорго билет: 7.65с</a:t>
+              <a:t>Чоңдорго билет: 7,65с</a:t>
             </a:r>
           </a:p>
           <a:p>
             <a:pPr algn="ctr"/>
             <a:r>
               <a:rPr lang="ru-RU" sz="1400" dirty="0"/>
-              <a:t>Балдар билети: 5.45с</a:t>
+              <a:t>Балдар билети: 5,45с</a:t>
             </a:r>
           </a:p>
           <a:p>
@@ -14227,7 +14227,7 @@
             <a:pPr algn="ctr"/>
             <a:r>
               <a:rPr lang="ky-KG" sz="1400" dirty="0"/>
-              <a:t>ЖЕ,4.62 с-го  10 карандаш</a:t>
+              <a:t>ЖЕ,4,62 с-го  10 карандаш</a:t>
             </a:r>
           </a:p>
           <a:p>
@@ -14292,7 +14292,7 @@
             <a:pPr algn="ctr"/>
             <a:r>
               <a:rPr lang="ru-RU" sz="1400" dirty="0"/>
-              <a:t>Чоңдорго билет: 5.23</a:t>
+              <a:t>Чоңдорго билет: 5,23</a:t>
             </a:r>
             <a:r>
               <a:rPr lang="en-US" sz="1400" dirty="0"/>
@@ -14304,7 +14304,7 @@
             <a:pPr algn="ctr"/>
             <a:r>
               <a:rPr lang="ru-RU" sz="1400" dirty="0"/>
-              <a:t>Балдар билети: 4.13</a:t>
+              <a:t>Балдар билети: 4,13</a:t>
             </a:r>
             <a:r>
               <a:rPr lang="en-US" sz="1400" dirty="0"/>
@@ -14393,7 +14393,7 @@
             <a:pPr algn="ctr"/>
             <a:r>
               <a:rPr lang="ky-KG" sz="1400" dirty="0"/>
-              <a:t>4.56сомго 20 сызгыч</a:t>
+              <a:t>4,56сомго 20 сызгыч</a:t>
             </a:r>
           </a:p>
           <a:p>
@@ -14458,7 +14458,7 @@
             <a:pPr algn="ctr"/>
             <a:r>
               <a:rPr lang="ru-RU" sz="1400" dirty="0"/>
-              <a:t>3.40сомго  6 шаурма</a:t>
+              <a:t>3,40сомго  6 шаурма</a:t>
             </a:r>
           </a:p>
           <a:p>
@@ -16240,7 +16240,7 @@
                   <a:schemeClr val="tx1"/>
                 </a:solidFill>
               </a:rPr>
-              <a:t>11.54</a:t>
+              <a:t>11,54</a:t>
             </a:r>
             <a:r>
               <a:rPr lang="ky-KG" sz="1950" dirty="0">
@@ -16322,7 +16322,7 @@
                   <a:schemeClr val="tx1"/>
                 </a:solidFill>
               </a:rPr>
-              <a:t>£7.94</a:t>
+              <a:t>£7,94</a:t>
             </a:r>
             <a:r>
               <a:rPr lang="ky-KG" sz="1950" dirty="0">
@@ -16404,7 +16404,7 @@
                   <a:schemeClr val="tx1"/>
                 </a:solidFill>
               </a:rPr>
-              <a:t>19.61</a:t>
+              <a:t>19,61</a:t>
             </a:r>
             <a:r>
               <a:rPr lang="ky-KG" sz="1950" dirty="0">
@@ -16483,7 +16483,7 @@
                   <a:schemeClr val="tx1"/>
                 </a:solidFill>
               </a:rPr>
-              <a:t>4.67</a:t>
+              <a:t>4,67</a:t>
             </a:r>
             <a:r>
               <a:rPr lang="ky-KG" sz="1950" dirty="0">
@@ -17531,7 +17531,7 @@
                   <a:schemeClr val="tx1"/>
                 </a:solidFill>
               </a:rPr>
-              <a:t>10.59</a:t>
+              <a:t>10,59</a:t>
             </a:r>
             <a:r>
               <a:rPr lang="ky-KG" sz="1950" dirty="0">
@@ -17621,7 +17621,7 @@
                   <a:schemeClr val="tx1"/>
                 </a:solidFill>
               </a:rPr>
-              <a:t>.</a:t>
+              <a:t>,</a:t>
             </a:r>
             <a:r>
               <a:rPr lang="en-GB" sz="1950" dirty="0">
@@ -17711,7 +17711,7 @@
                   <a:schemeClr val="tx1"/>
                 </a:solidFill>
               </a:rPr>
-              <a:t>5.24</a:t>
+              <a:t>5,24</a:t>
             </a:r>
             <a:r>
               <a:rPr lang="ky-KG" sz="1950" dirty="0">
@@ -17790,7 +17790,7 @@
                   <a:schemeClr val="tx1"/>
                 </a:solidFill>
               </a:rPr>
-              <a:t>4.55</a:t>
+              <a:t>4,55</a:t>
             </a:r>
             <a:r>
               <a:rPr lang="ky-KG" sz="1950" dirty="0">
@@ -17869,7 +17869,7 @@
                   <a:schemeClr val="tx1"/>
                 </a:solidFill>
               </a:rPr>
-              <a:t>5.35</a:t>
+              <a:t>5,35</a:t>
             </a:r>
             <a:r>
               <a:rPr lang="ky-KG" sz="1950" dirty="0">
@@ -17948,7 +17948,7 @@
                   <a:schemeClr val="tx1"/>
                 </a:solidFill>
               </a:rPr>
-              <a:t>7.93</a:t>
+              <a:t>7,93</a:t>
             </a:r>
             <a:r>
               <a:rPr lang="ky-KG" sz="1950" dirty="0">
@@ -18027,7 +18027,7 @@
                   <a:schemeClr val="tx1"/>
                 </a:solidFill>
               </a:rPr>
-              <a:t>7.99</a:t>
+              <a:t>7,99</a:t>
             </a:r>
             <a:r>
               <a:rPr lang="ky-KG" sz="1950" dirty="0">
@@ -18109,7 +18109,7 @@
                   <a:schemeClr val="tx1"/>
                 </a:solidFill>
               </a:rPr>
-              <a:t>8.85</a:t>
+              <a:t>8,85</a:t>
             </a:r>
             <a:r>
               <a:rPr lang="ky-KG" sz="1950" dirty="0">
@@ -18191,7 +18191,7 @@
                   <a:schemeClr val="tx1"/>
                 </a:solidFill>
               </a:rPr>
-              <a:t>14.20</a:t>
+              <a:t>14,20</a:t>
             </a:r>
             <a:r>
               <a:rPr lang="ky-KG" sz="1950" dirty="0">
@@ -18273,7 +18273,7 @@
                   <a:schemeClr val="tx1"/>
                 </a:solidFill>
               </a:rPr>
-              <a:t>25.44</a:t>
+              <a:t>25,44</a:t>
             </a:r>
             <a:r>
               <a:rPr lang="ky-KG" sz="1950" dirty="0">
@@ -18352,7 +18352,7 @@
                   <a:schemeClr val="tx1"/>
                 </a:solidFill>
               </a:rPr>
-              <a:t>6.87</a:t>
+              <a:t>6,87</a:t>
             </a:r>
             <a:r>
               <a:rPr lang="ky-KG" sz="1950" dirty="0">
@@ -18431,7 +18431,7 @@
                   <a:schemeClr val="tx1"/>
                 </a:solidFill>
               </a:rPr>
-              <a:t>16.58</a:t>
+              <a:t>16,58</a:t>
             </a:r>
             <a:r>
               <a:rPr lang="ky-KG" sz="1950" dirty="0">
@@ -18513,7 +18513,7 @@
                   <a:schemeClr val="tx1"/>
                 </a:solidFill>
               </a:rPr>
-              <a:t>17.04</a:t>
+              <a:t>17,04</a:t>
             </a:r>
             <a:r>
               <a:rPr lang="ky-KG" sz="1950" dirty="0">
@@ -18592,7 +18592,7 @@
                   <a:schemeClr val="tx1"/>
                 </a:solidFill>
               </a:rPr>
-              <a:t>95.53</a:t>
+              <a:t>95,53</a:t>
             </a:r>
             <a:r>
               <a:rPr lang="ky-KG" sz="1950" dirty="0">
@@ -18674,7 +18674,7 @@
                   <a:schemeClr val="tx1"/>
                 </a:solidFill>
               </a:rPr>
-              <a:t>96.25</a:t>
+              <a:t>96,25</a:t>
             </a:r>
             <a:r>
               <a:rPr lang="ky-KG" sz="1950" dirty="0">
@@ -19128,7 +19128,7 @@
             <a:pPr algn="ctr"/>
             <a:r>
               <a:rPr lang="ru-RU" sz="1400" dirty="0"/>
-              <a:t>3.75сомго 10 калем</a:t>
+              <a:t>3,75сомго 10 калем</a:t>
             </a:r>
           </a:p>
           <a:p>
@@ -19324,14 +19324,14 @@
             <a:pPr algn="ctr"/>
             <a:r>
               <a:rPr lang="ky-KG" sz="1400" dirty="0"/>
-              <a:t>4.24 с-го 20 карандаш,</a:t>
+              <a:t>4,24 с-го 20 карандаш,</a:t>
             </a:r>
           </a:p>
           <a:p>
             <a:pPr algn="ctr"/>
             <a:r>
               <a:rPr lang="ky-KG" sz="1400" dirty="0"/>
-              <a:t>ЖЕ 3.20с-го 10 карандаш </a:t>
+              <a:t>ЖЕ 3,20с-го 10 карандаш </a:t>
             </a:r>
           </a:p>
           <a:p>
@@ -19396,14 +19396,14 @@
             <a:pPr algn="ctr"/>
             <a:r>
               <a:rPr lang="ru-RU" sz="1400" dirty="0"/>
-              <a:t>Чоңдорго билет: 7.65с</a:t>
+              <a:t>Чоңдорго билет: 7,65с</a:t>
             </a:r>
           </a:p>
           <a:p>
             <a:pPr algn="ctr"/>
             <a:r>
               <a:rPr lang="ru-RU" sz="1400" dirty="0"/>
-              <a:t>Балдар билети: 5.45с</a:t>
+              <a:t>Балдар билети: 5,45с</a:t>
             </a:r>
           </a:p>
           <a:p>
@@ -19789,7 +19789,7 @@
             <a:pPr algn="ctr"/>
             <a:r>
               <a:rPr lang="ky-KG" sz="1400" dirty="0"/>
-              <a:t>ЖЕ,4.62 с-го  10 карандаш</a:t>
+              <a:t>ЖЕ,4,62 с-го  10 карандаш</a:t>
             </a:r>
           </a:p>
           <a:p>
@@ -19854,7 +19854,7 @@
             <a:pPr algn="ctr"/>
             <a:r>
               <a:rPr lang="ru-RU" sz="1400" dirty="0"/>
-              <a:t>Чоңдорго билет: 5.23</a:t>
+              <a:t>Чоңдорго билет: 5,23</a:t>
             </a:r>
             <a:r>
               <a:rPr lang="en-US" sz="1400" dirty="0"/>
@@ -19866,7 +19866,7 @@
             <a:pPr algn="ctr"/>
             <a:r>
               <a:rPr lang="ru-RU" sz="1400" dirty="0"/>
-              <a:t>Балдар билети: 4.13</a:t>
+              <a:t>Балдар билети: 4,13</a:t>
             </a:r>
             <a:r>
               <a:rPr lang="en-US" sz="1400" dirty="0"/>
@@ -19955,7 +19955,7 @@
             <a:pPr algn="ctr"/>
             <a:r>
               <a:rPr lang="ky-KG" sz="1400" dirty="0"/>
-              <a:t>4.56сомго 20 сызгыч</a:t>
+              <a:t>4,56сомго 20 сызгыч</a:t>
             </a:r>
           </a:p>
           <a:p>
@@ -20020,7 +20020,7 @@
             <a:pPr algn="ctr"/>
             <a:r>
               <a:rPr lang="ru-RU" sz="1400" dirty="0"/>
-              <a:t>3.40сомго  6 шаурма</a:t>
+              <a:t>3,40сомго  6 шаурма</a:t>
             </a:r>
           </a:p>
           <a:p>
